--- a/assets/pptx/catalog-303.pptx
+++ b/assets/pptx/catalog-303.pptx
@@ -3386,7 +3386,7 @@
                 <a:ea typeface="Ebrima"/>
                 <a:cs typeface="Ebrima"/>
               </a:rPr>
-              <a:t>ምክንያቱ ነህ አንተ በህይወት ለመኖሬ (2x)</a:t>
+              <a:t>ምክንያቱ ነህ አንተ በህይወት ለመኖሬ 2x</a:t>
             </a:r>
           </a:p>
         </p:txBody>
@@ -3574,7 +3574,7 @@
                 <a:ea typeface="Ebrima"/>
                 <a:cs typeface="Ebrima"/>
               </a:rPr>
-              <a:t>ምክንያቱ ነህ አንተ በህይወት ለመኖሬ (2x)</a:t>
+              <a:t>ምክንያቱ ነህ አንተ በህይወት ለመኖሬ 2x</a:t>
             </a:r>
           </a:p>
         </p:txBody>
@@ -3780,7 +3780,7 @@
                 <a:ea typeface="Ebrima"/>
                 <a:cs typeface="Ebrima"/>
               </a:rPr>
-              <a:t>ምክንያቱ ነህ አንተ በህይወት ለመኖሬ (2x)</a:t>
+              <a:t>ምክንያቱ ነህ አንተ በህይወት ለመኖሬ 2x</a:t>
             </a:r>
           </a:p>
         </p:txBody>
